--- a/nutrition/nutrient_animation.pptx
+++ b/nutrition/nutrient_animation.pptx
@@ -532,7 +532,7 @@
               <c:strCache>
                 <c:ptCount val="1"/>
                 <c:pt idx="0">
-                  <c:v>豆腐の味噌汁</c:v>
+                  <c:v>じゃがいもの味噌汁</c:v>
                 </c:pt>
               </c:strCache>
             </c:strRef>
@@ -618,37 +618,37 @@
                 <c:formatCode>General</c:formatCode>
                 <c:ptCount val="11"/>
                 <c:pt idx="0">
-                  <c:v>1.8</c:v>
+                  <c:v>2.2</c:v>
                 </c:pt>
                 <c:pt idx="1">
-                  <c:v>6.5</c:v>
+                  <c:v>4.8</c:v>
                 </c:pt>
                 <c:pt idx="2">
-                  <c:v>2.5</c:v>
+                  <c:v>1</c:v>
                 </c:pt>
                 <c:pt idx="3">
-                  <c:v>1.2</c:v>
+                  <c:v>3.1</c:v>
                 </c:pt>
                 <c:pt idx="4">
-                  <c:v>5.1</c:v>
+                  <c:v>2.2</c:v>
                 </c:pt>
                 <c:pt idx="5">
-                  <c:v>10</c:v>
+                  <c:v>8</c:v>
                 </c:pt>
                 <c:pt idx="6">
                   <c:v>0</c:v>
                 </c:pt>
                 <c:pt idx="7">
-                  <c:v>2.1</c:v>
+                  <c:v>3.6</c:v>
                 </c:pt>
                 <c:pt idx="8">
                   <c:v>2.5</c:v>
                 </c:pt>
                 <c:pt idx="9">
-                  <c:v>1</c:v>
+                  <c:v>12</c:v>
                 </c:pt>
                 <c:pt idx="10">
-                  <c:v>8.2</c:v>
+                  <c:v>26.5</c:v>
                 </c:pt>
               </c:numCache>
             </c:numRef>
@@ -1178,7 +1178,7 @@
         <c:axId val="2094734552"/>
         <c:scaling>
           <c:orientation val="minMax"/>
-          <c:max val="90"/>
+          <c:max val="100"/>
           <c:min val="0"/>
         </c:scaling>
         <c:delete val="0"/>
@@ -1704,7 +1704,7 @@
               <c:strCache>
                 <c:ptCount val="1"/>
                 <c:pt idx="0">
-                  <c:v>豆腐の味噌汁</c:v>
+                  <c:v>じゃがいもの味噌汁</c:v>
                 </c:pt>
               </c:strCache>
             </c:strRef>
@@ -1790,37 +1790,37 @@
                 <c:formatCode>General</c:formatCode>
                 <c:ptCount val="11"/>
                 <c:pt idx="0">
-                  <c:v>1.6</c:v>
+                  <c:v>2</c:v>
                 </c:pt>
                 <c:pt idx="1">
-                  <c:v>6</c:v>
+                  <c:v>4.5</c:v>
                 </c:pt>
                 <c:pt idx="2">
-                  <c:v>2.3</c:v>
+                  <c:v>0.9</c:v>
                 </c:pt>
                 <c:pt idx="3">
-                  <c:v>1.1</c:v>
+                  <c:v>2.9</c:v>
                 </c:pt>
                 <c:pt idx="4">
-                  <c:v>6.4</c:v>
+                  <c:v>2.8</c:v>
                 </c:pt>
                 <c:pt idx="5">
-                  <c:v>10</c:v>
+                  <c:v>8</c:v>
                 </c:pt>
                 <c:pt idx="6">
                   <c:v>0</c:v>
                 </c:pt>
                 <c:pt idx="7">
-                  <c:v>2</c:v>
+                  <c:v>3.3</c:v>
                 </c:pt>
                 <c:pt idx="8">
                   <c:v>2.4</c:v>
                 </c:pt>
                 <c:pt idx="9">
-                  <c:v>1</c:v>
+                  <c:v>12</c:v>
                 </c:pt>
                 <c:pt idx="10">
-                  <c:v>7.4</c:v>
+                  <c:v>23.7</c:v>
                 </c:pt>
               </c:numCache>
             </c:numRef>
@@ -2350,7 +2350,7 @@
         <c:axId val="2094734552"/>
         <c:scaling>
           <c:orientation val="minMax"/>
-          <c:max val="90"/>
+          <c:max val="100"/>
           <c:min val="0"/>
         </c:scaling>
         <c:delete val="0"/>
@@ -3371,7 +3371,7 @@
         </p:nvSpPr>
         <p:spPr>
           <a:xfrm>
-            <a:off x="8630107" y="3498732"/>
+            <a:off x="8630107" y="3654431"/>
             <a:ext cx="731520" cy="548640"/>
           </a:xfrm>
           <a:prstGeom prst="rect">
@@ -3664,7 +3664,7 @@
                 <a:ea typeface="Yu Gothic" pitchFamily="34" charset="-122"/>
                 <a:cs typeface="Yu Gothic" pitchFamily="34" charset="-120"/>
               </a:rPr>
-              <a:t>豆腐の味噌汁</a:t>
+              <a:t>じゃがいもの味噌汁</a:t>
             </a:r>
             <a:endParaRPr lang="en-US" sz="1600" dirty="0"/>
           </a:p>
@@ -4590,7 +4590,7 @@
         </p:nvSpPr>
         <p:spPr>
           <a:xfrm>
-            <a:off x="8630107" y="3498732"/>
+            <a:off x="8630107" y="3654431"/>
             <a:ext cx="731520" cy="548640"/>
           </a:xfrm>
           <a:prstGeom prst="rect">
@@ -4883,7 +4883,7 @@
                 <a:ea typeface="Yu Gothic" pitchFamily="34" charset="-122"/>
                 <a:cs typeface="Yu Gothic" pitchFamily="34" charset="-120"/>
               </a:rPr>
-              <a:t>豆腐の味噌汁</a:t>
+              <a:t>じゃがいもの味噌汁</a:t>
             </a:r>
             <a:endParaRPr lang="en-US" sz="1600" dirty="0"/>
           </a:p>
